--- a/Lecture slides/AMOS B01 - Team and Tools.pptx
+++ b/Lecture slides/AMOS B01 - Team and Tools.pptx
@@ -5802,7 +5802,7 @@
   <p:cSld>
     <p:spTree>
       <p:nvGrpSpPr>
-        <p:cNvPr id="464" name="Shape 464"/>
+        <p:cNvPr id="465" name="Shape 465"/>
         <p:cNvGrpSpPr/>
         <p:nvPr/>
       </p:nvGrpSpPr>
@@ -5816,7 +5816,7 @@
       </p:grpSpPr>
       <p:sp>
         <p:nvSpPr>
-          <p:cNvPr id="465" name="Google Shape;465;g22c56dd9f66_0_3:notes"/>
+          <p:cNvPr id="466" name="Google Shape;466;g22c56dd9f66_0_3:notes"/>
           <p:cNvSpPr/>
           <p:nvPr>
             <p:ph idx="2" type="sldImg"/>
@@ -5851,7 +5851,7 @@
       </p:sp>
       <p:sp>
         <p:nvSpPr>
-          <p:cNvPr id="466" name="Google Shape;466;g22c56dd9f66_0_3:notes"/>
+          <p:cNvPr id="467" name="Google Shape;467;g22c56dd9f66_0_3:notes"/>
           <p:cNvSpPr txBox="1"/>
           <p:nvPr>
             <p:ph idx="1" type="body"/>
@@ -5901,7 +5901,7 @@
   <p:cSld>
     <p:spTree>
       <p:nvGrpSpPr>
-        <p:cNvPr id="472" name="Shape 472"/>
+        <p:cNvPr id="473" name="Shape 473"/>
         <p:cNvGrpSpPr/>
         <p:nvPr/>
       </p:nvGrpSpPr>
@@ -5915,7 +5915,7 @@
       </p:grpSpPr>
       <p:sp>
         <p:nvSpPr>
-          <p:cNvPr id="473" name="Google Shape;473;g22c3a52a549_0_28:notes"/>
+          <p:cNvPr id="474" name="Google Shape;474;g22c3a52a549_0_28:notes"/>
           <p:cNvSpPr/>
           <p:nvPr>
             <p:ph idx="2" type="sldImg"/>
@@ -5950,7 +5950,7 @@
       </p:sp>
       <p:sp>
         <p:nvSpPr>
-          <p:cNvPr id="474" name="Google Shape;474;g22c3a52a549_0_28:notes"/>
+          <p:cNvPr id="475" name="Google Shape;475;g22c3a52a549_0_28:notes"/>
           <p:cNvSpPr txBox="1"/>
           <p:nvPr>
             <p:ph idx="1" type="body"/>
@@ -6000,7 +6000,7 @@
   <p:cSld>
     <p:spTree>
       <p:nvGrpSpPr>
-        <p:cNvPr id="477" name="Shape 477"/>
+        <p:cNvPr id="478" name="Shape 478"/>
         <p:cNvGrpSpPr/>
         <p:nvPr/>
       </p:nvGrpSpPr>
@@ -6014,7 +6014,7 @@
       </p:grpSpPr>
       <p:sp>
         <p:nvSpPr>
-          <p:cNvPr id="478" name="Google Shape;478;g152a3f74d0d_0_44:notes"/>
+          <p:cNvPr id="479" name="Google Shape;479;g152a3f74d0d_0_44:notes"/>
           <p:cNvSpPr/>
           <p:nvPr>
             <p:ph idx="2" type="sldImg"/>
@@ -6049,7 +6049,7 @@
       </p:sp>
       <p:sp>
         <p:nvSpPr>
-          <p:cNvPr id="479" name="Google Shape;479;g152a3f74d0d_0_44:notes"/>
+          <p:cNvPr id="480" name="Google Shape;480;g152a3f74d0d_0_44:notes"/>
           <p:cNvSpPr txBox="1"/>
           <p:nvPr>
             <p:ph idx="1" type="body"/>
@@ -6099,7 +6099,7 @@
   <p:cSld>
     <p:spTree>
       <p:nvGrpSpPr>
-        <p:cNvPr id="486" name="Shape 486"/>
+        <p:cNvPr id="487" name="Shape 487"/>
         <p:cNvGrpSpPr/>
         <p:nvPr/>
       </p:nvGrpSpPr>
@@ -6113,7 +6113,7 @@
       </p:grpSpPr>
       <p:sp>
         <p:nvSpPr>
-          <p:cNvPr id="487" name="Google Shape;487;g22c56dd9f66_0_29:notes"/>
+          <p:cNvPr id="488" name="Google Shape;488;g22c56dd9f66_0_29:notes"/>
           <p:cNvSpPr/>
           <p:nvPr>
             <p:ph idx="2" type="sldImg"/>
@@ -6148,7 +6148,7 @@
       </p:sp>
       <p:sp>
         <p:nvSpPr>
-          <p:cNvPr id="488" name="Google Shape;488;g22c56dd9f66_0_29:notes"/>
+          <p:cNvPr id="489" name="Google Shape;489;g22c56dd9f66_0_29:notes"/>
           <p:cNvSpPr txBox="1"/>
           <p:nvPr>
             <p:ph idx="1" type="body"/>
@@ -6297,7 +6297,7 @@
   <p:cSld>
     <p:spTree>
       <p:nvGrpSpPr>
-        <p:cNvPr id="493" name="Shape 493"/>
+        <p:cNvPr id="494" name="Shape 494"/>
         <p:cNvGrpSpPr/>
         <p:nvPr/>
       </p:nvGrpSpPr>
@@ -6311,7 +6311,7 @@
       </p:grpSpPr>
       <p:sp>
         <p:nvSpPr>
-          <p:cNvPr id="494" name="Google Shape;494;g22c56dd9f66_0_37:notes"/>
+          <p:cNvPr id="495" name="Google Shape;495;g22c56dd9f66_0_37:notes"/>
           <p:cNvSpPr/>
           <p:nvPr>
             <p:ph idx="2" type="sldImg"/>
@@ -6346,7 +6346,7 @@
       </p:sp>
       <p:sp>
         <p:nvSpPr>
-          <p:cNvPr id="495" name="Google Shape;495;g22c56dd9f66_0_37:notes"/>
+          <p:cNvPr id="496" name="Google Shape;496;g22c56dd9f66_0_37:notes"/>
           <p:cNvSpPr txBox="1"/>
           <p:nvPr>
             <p:ph idx="1" type="body"/>
@@ -6396,7 +6396,7 @@
   <p:cSld>
     <p:spTree>
       <p:nvGrpSpPr>
-        <p:cNvPr id="500" name="Shape 500"/>
+        <p:cNvPr id="501" name="Shape 501"/>
         <p:cNvGrpSpPr/>
         <p:nvPr/>
       </p:nvGrpSpPr>
@@ -6410,7 +6410,7 @@
       </p:grpSpPr>
       <p:sp>
         <p:nvSpPr>
-          <p:cNvPr id="501" name="Google Shape;501;g239869f5abc_0_38:notes"/>
+          <p:cNvPr id="502" name="Google Shape;502;g239869f5abc_0_38:notes"/>
           <p:cNvSpPr/>
           <p:nvPr>
             <p:ph idx="2" type="sldImg"/>
@@ -6445,7 +6445,7 @@
       </p:sp>
       <p:sp>
         <p:nvSpPr>
-          <p:cNvPr id="502" name="Google Shape;502;g239869f5abc_0_38:notes"/>
+          <p:cNvPr id="503" name="Google Shape;503;g239869f5abc_0_38:notes"/>
           <p:cNvSpPr txBox="1"/>
           <p:nvPr>
             <p:ph idx="1" type="body"/>
@@ -6495,7 +6495,7 @@
   <p:cSld>
     <p:spTree>
       <p:nvGrpSpPr>
-        <p:cNvPr id="506" name="Shape 506"/>
+        <p:cNvPr id="507" name="Shape 507"/>
         <p:cNvGrpSpPr/>
         <p:nvPr/>
       </p:nvGrpSpPr>
@@ -6509,7 +6509,7 @@
       </p:grpSpPr>
       <p:sp>
         <p:nvSpPr>
-          <p:cNvPr id="507" name="Google Shape;507;g239869f5abc_0_43:notes"/>
+          <p:cNvPr id="508" name="Google Shape;508;g239869f5abc_0_43:notes"/>
           <p:cNvSpPr/>
           <p:nvPr>
             <p:ph idx="2" type="sldImg"/>
@@ -6544,7 +6544,7 @@
       </p:sp>
       <p:sp>
         <p:nvSpPr>
-          <p:cNvPr id="508" name="Google Shape;508;g239869f5abc_0_43:notes"/>
+          <p:cNvPr id="509" name="Google Shape;509;g239869f5abc_0_43:notes"/>
           <p:cNvSpPr txBox="1"/>
           <p:nvPr>
             <p:ph idx="1" type="body"/>
@@ -17605,7 +17605,7 @@
             <a:tbl>
               <a:tblPr>
                 <a:noFill/>
-                <a:tableStyleId>{3F3F5E55-9B0B-47E0-9DEB-F5BFAA86F13F}</a:tableStyleId>
+                <a:tableStyleId>{666AA95A-A93B-462D-889F-7D251E3C9532}</a:tableStyleId>
               </a:tblPr>
               <a:tblGrid>
                 <a:gridCol w="524750"/>
@@ -21626,7 +21626,7 @@
             <a:tbl>
               <a:tblPr>
                 <a:noFill/>
-                <a:tableStyleId>{40F53428-5582-4234-8027-4FD8F5D3A187}</a:tableStyleId>
+                <a:tableStyleId>{1080B285-DD26-4382-9D89-CEF7B5E0849D}</a:tableStyleId>
               </a:tblPr>
               <a:tblGrid>
                 <a:gridCol w="2148850"/>
@@ -29822,7 +29822,7 @@
             </a:pPr>
             <a:r>
               <a:rPr lang="en"/>
-              <a:t>What are your next steps / plans of work to do?</a:t>
+              <a:t>What are your next steps / plans of work to do? [1]</a:t>
             </a:r>
             <a:endParaRPr/>
           </a:p>
@@ -29963,6 +29963,48 @@
               <a:t> </a:t>
             </a:r>
             <a:endParaRPr b="0" sz="900"/>
+          </a:p>
+        </p:txBody>
+      </p:sp>
+      <p:sp>
+        <p:nvSpPr>
+          <p:cNvPr id="464" name="Google Shape;464;p69"/>
+          <p:cNvSpPr txBox="1"/>
+          <p:nvPr/>
+        </p:nvSpPr>
+        <p:spPr>
+          <a:xfrm>
+            <a:off x="0" y="4233672"/>
+            <a:ext cx="7315200" cy="914400"/>
+          </a:xfrm>
+          <a:prstGeom prst="rect">
+            <a:avLst/>
+          </a:prstGeom>
+          <a:noFill/>
+          <a:ln>
+            <a:noFill/>
+          </a:ln>
+        </p:spPr>
+        <p:txBody>
+          <a:bodyPr anchorCtr="0" anchor="b" bIns="91425" lIns="91425" spcFirstLastPara="1" rIns="91425" wrap="square" tIns="91425">
+            <a:noAutofit/>
+          </a:bodyPr>
+          <a:lstStyle/>
+          <a:p>
+            <a:pPr indent="0" lvl="0" marL="0" rtl="0" algn="l">
+              <a:spcBef>
+                <a:spcPts val="0"/>
+              </a:spcBef>
+              <a:spcAft>
+                <a:spcPts val="0"/>
+              </a:spcAft>
+              <a:buNone/>
+            </a:pPr>
+            <a:r>
+              <a:rPr lang="en"/>
+              <a:t>[1] Don’t state the obvious like “do work” or “attend meeting”</a:t>
+            </a:r>
+            <a:endParaRPr/>
           </a:p>
         </p:txBody>
       </p:sp>
@@ -29979,7 +30021,7 @@
   <p:cSld>
     <p:spTree>
       <p:nvGrpSpPr>
-        <p:cNvPr id="467" name="Shape 467"/>
+        <p:cNvPr id="468" name="Shape 468"/>
         <p:cNvGrpSpPr/>
         <p:nvPr/>
       </p:nvGrpSpPr>
@@ -29993,7 +30035,7 @@
       </p:grpSpPr>
       <p:sp>
         <p:nvSpPr>
-          <p:cNvPr id="468" name="Google Shape;468;p70"/>
+          <p:cNvPr id="469" name="Google Shape;469;p70"/>
           <p:cNvSpPr txBox="1"/>
           <p:nvPr>
             <p:ph type="title"/>
@@ -30037,7 +30079,7 @@
       </p:sp>
       <p:sp>
         <p:nvSpPr>
-          <p:cNvPr id="469" name="Google Shape;469;p70"/>
+          <p:cNvPr id="470" name="Google Shape;470;p70"/>
           <p:cNvSpPr txBox="1"/>
           <p:nvPr>
             <p:ph idx="1" type="body"/>
@@ -30111,7 +30153,7 @@
       </p:sp>
       <p:sp>
         <p:nvSpPr>
-          <p:cNvPr id="470" name="Google Shape;470;p70"/>
+          <p:cNvPr id="471" name="Google Shape;471;p70"/>
           <p:cNvSpPr txBox="1"/>
           <p:nvPr>
             <p:ph idx="12" type="sldNum"/>
@@ -30184,7 +30226,7 @@
       </p:sp>
       <p:pic>
         <p:nvPicPr>
-          <p:cNvPr id="471" name="Google Shape;471;p70"/>
+          <p:cNvPr id="472" name="Google Shape;472;p70"/>
           <p:cNvPicPr preferRelativeResize="0"/>
           <p:nvPr/>
         </p:nvPicPr>
@@ -30229,7 +30271,7 @@
   <p:cSld>
     <p:spTree>
       <p:nvGrpSpPr>
-        <p:cNvPr id="475" name="Shape 475"/>
+        <p:cNvPr id="476" name="Shape 476"/>
         <p:cNvGrpSpPr/>
         <p:nvPr/>
       </p:nvGrpSpPr>
@@ -30243,7 +30285,7 @@
       </p:grpSpPr>
       <p:sp>
         <p:nvSpPr>
-          <p:cNvPr id="476" name="Google Shape;476;p71"/>
+          <p:cNvPr id="477" name="Google Shape;477;p71"/>
           <p:cNvSpPr txBox="1"/>
           <p:nvPr>
             <p:ph type="title"/>
@@ -30294,7 +30336,7 @@
   <p:cSld>
     <p:spTree>
       <p:nvGrpSpPr>
-        <p:cNvPr id="480" name="Shape 480"/>
+        <p:cNvPr id="481" name="Shape 481"/>
         <p:cNvGrpSpPr/>
         <p:nvPr/>
       </p:nvGrpSpPr>
@@ -30308,7 +30350,7 @@
       </p:grpSpPr>
       <p:sp>
         <p:nvSpPr>
-          <p:cNvPr id="481" name="Google Shape;481;p72"/>
+          <p:cNvPr id="482" name="Google Shape;482;p72"/>
           <p:cNvSpPr txBox="1"/>
           <p:nvPr>
             <p:ph type="title"/>
@@ -30348,7 +30390,7 @@
       </p:sp>
       <p:sp>
         <p:nvSpPr>
-          <p:cNvPr id="482" name="Google Shape;482;p72"/>
+          <p:cNvPr id="483" name="Google Shape;483;p72"/>
           <p:cNvSpPr txBox="1"/>
           <p:nvPr>
             <p:ph idx="1" type="body"/>
@@ -30388,7 +30430,7 @@
       </p:sp>
       <p:sp>
         <p:nvSpPr>
-          <p:cNvPr id="483" name="Google Shape;483;p72"/>
+          <p:cNvPr id="484" name="Google Shape;484;p72"/>
           <p:cNvSpPr txBox="1"/>
           <p:nvPr>
             <p:ph idx="12" type="sldNum"/>
@@ -30461,7 +30503,7 @@
       </p:sp>
       <p:pic>
         <p:nvPicPr>
-          <p:cNvPr id="484" name="Google Shape;484;p72"/>
+          <p:cNvPr id="485" name="Google Shape;485;p72"/>
           <p:cNvPicPr preferRelativeResize="0"/>
           <p:nvPr/>
         </p:nvPicPr>
@@ -30495,7 +30537,7 @@
       </p:pic>
       <p:sp>
         <p:nvSpPr>
-          <p:cNvPr id="485" name="Google Shape;485;p72"/>
+          <p:cNvPr id="486" name="Google Shape;486;p72"/>
           <p:cNvSpPr txBox="1"/>
           <p:nvPr/>
         </p:nvSpPr>
@@ -30552,7 +30594,7 @@
   <p:cSld>
     <p:spTree>
       <p:nvGrpSpPr>
-        <p:cNvPr id="489" name="Shape 489"/>
+        <p:cNvPr id="490" name="Shape 490"/>
         <p:cNvGrpSpPr/>
         <p:nvPr/>
       </p:nvGrpSpPr>
@@ -30566,7 +30608,7 @@
       </p:grpSpPr>
       <p:sp>
         <p:nvSpPr>
-          <p:cNvPr id="490" name="Google Shape;490;p73"/>
+          <p:cNvPr id="491" name="Google Shape;491;p73"/>
           <p:cNvSpPr txBox="1"/>
           <p:nvPr>
             <p:ph type="title"/>
@@ -30606,7 +30648,7 @@
       </p:sp>
       <p:sp>
         <p:nvSpPr>
-          <p:cNvPr id="491" name="Google Shape;491;p73"/>
+          <p:cNvPr id="492" name="Google Shape;492;p73"/>
           <p:cNvSpPr txBox="1"/>
           <p:nvPr>
             <p:ph idx="1" type="body"/>
@@ -30712,7 +30754,7 @@
       </p:sp>
       <p:sp>
         <p:nvSpPr>
-          <p:cNvPr id="492" name="Google Shape;492;p73"/>
+          <p:cNvPr id="493" name="Google Shape;493;p73"/>
           <p:cNvSpPr txBox="1"/>
           <p:nvPr>
             <p:ph idx="12" type="sldNum"/>
@@ -31072,7 +31114,7 @@
   <p:cSld>
     <p:spTree>
       <p:nvGrpSpPr>
-        <p:cNvPr id="496" name="Shape 496"/>
+        <p:cNvPr id="497" name="Shape 497"/>
         <p:cNvGrpSpPr/>
         <p:nvPr/>
       </p:nvGrpSpPr>
@@ -31086,7 +31128,7 @@
       </p:grpSpPr>
       <p:sp>
         <p:nvSpPr>
-          <p:cNvPr id="497" name="Google Shape;497;p74"/>
+          <p:cNvPr id="498" name="Google Shape;498;p74"/>
           <p:cNvSpPr txBox="1"/>
           <p:nvPr>
             <p:ph idx="1" type="body"/>
@@ -31314,7 +31356,7 @@
       </p:sp>
       <p:sp>
         <p:nvSpPr>
-          <p:cNvPr id="498" name="Google Shape;498;p74"/>
+          <p:cNvPr id="499" name="Google Shape;499;p74"/>
           <p:cNvSpPr txBox="1"/>
           <p:nvPr>
             <p:ph type="title"/>
@@ -31354,7 +31396,7 @@
       </p:sp>
       <p:sp>
         <p:nvSpPr>
-          <p:cNvPr id="499" name="Google Shape;499;p74"/>
+          <p:cNvPr id="500" name="Google Shape;500;p74"/>
           <p:cNvSpPr txBox="1"/>
           <p:nvPr>
             <p:ph idx="12" type="sldNum"/>
@@ -31438,7 +31480,7 @@
   <p:cSld>
     <p:spTree>
       <p:nvGrpSpPr>
-        <p:cNvPr id="503" name="Shape 503"/>
+        <p:cNvPr id="504" name="Shape 504"/>
         <p:cNvGrpSpPr/>
         <p:nvPr/>
       </p:nvGrpSpPr>
@@ -31452,7 +31494,7 @@
       </p:grpSpPr>
       <p:sp>
         <p:nvSpPr>
-          <p:cNvPr id="504" name="Google Shape;504;p75"/>
+          <p:cNvPr id="505" name="Google Shape;505;p75"/>
           <p:cNvSpPr txBox="1"/>
           <p:nvPr>
             <p:ph type="ctrTitle"/>
@@ -31492,7 +31534,7 @@
       </p:sp>
       <p:sp>
         <p:nvSpPr>
-          <p:cNvPr id="505" name="Google Shape;505;p75"/>
+          <p:cNvPr id="506" name="Google Shape;506;p75"/>
           <p:cNvSpPr txBox="1"/>
           <p:nvPr>
             <p:ph idx="1" type="subTitle"/>
@@ -31622,7 +31664,7 @@
   <p:cSld>
     <p:spTree>
       <p:nvGrpSpPr>
-        <p:cNvPr id="509" name="Shape 509"/>
+        <p:cNvPr id="510" name="Shape 510"/>
         <p:cNvGrpSpPr/>
         <p:nvPr/>
       </p:nvGrpSpPr>
@@ -31636,7 +31678,7 @@
       </p:grpSpPr>
       <p:sp>
         <p:nvSpPr>
-          <p:cNvPr id="510" name="Google Shape;510;p76"/>
+          <p:cNvPr id="511" name="Google Shape;511;p76"/>
           <p:cNvSpPr txBox="1"/>
           <p:nvPr>
             <p:ph type="title"/>
@@ -31676,7 +31718,7 @@
       </p:sp>
       <p:sp>
         <p:nvSpPr>
-          <p:cNvPr id="511" name="Google Shape;511;p76"/>
+          <p:cNvPr id="512" name="Google Shape;512;p76"/>
           <p:cNvSpPr txBox="1"/>
           <p:nvPr>
             <p:ph idx="12" type="sldNum"/>
@@ -31749,7 +31791,7 @@
       </p:sp>
       <p:sp>
         <p:nvSpPr>
-          <p:cNvPr id="512" name="Google Shape;512;p76"/>
+          <p:cNvPr id="513" name="Google Shape;513;p76"/>
           <p:cNvSpPr txBox="1"/>
           <p:nvPr>
             <p:ph idx="1" type="body"/>

--- a/Lecture slides/AMOS B01 - Team and Tools.pptx
+++ b/Lecture slides/AMOS B01 - Team and Tools.pptx
@@ -100,7 +100,7 @@
         <a:srgbClr val="000000"/>
       </a:buClr>
       <a:buFont typeface="Arial"/>
-      <a:defRPr b="0" i="0" sz="1400" u="none" cap="none" strike="noStrike">
+      <a:defRPr b="0" i="0" spc="0" sz="1400" u="none" cap="none" strike="noStrike">
         <a:solidFill>
           <a:srgbClr val="000000"/>
         </a:solidFill>
@@ -124,7 +124,7 @@
         <a:srgbClr val="000000"/>
       </a:buClr>
       <a:buFont typeface="Arial"/>
-      <a:defRPr b="0" i="0" sz="1400" u="none" cap="none" strike="noStrike">
+      <a:defRPr b="0" i="0" spc="0" sz="1400" u="none" cap="none" strike="noStrike">
         <a:solidFill>
           <a:srgbClr val="000000"/>
         </a:solidFill>
@@ -148,7 +148,7 @@
         <a:srgbClr val="000000"/>
       </a:buClr>
       <a:buFont typeface="Arial"/>
-      <a:defRPr b="0" i="0" sz="1400" u="none" cap="none" strike="noStrike">
+      <a:defRPr b="0" i="0" spc="0" sz="1400" u="none" cap="none" strike="noStrike">
         <a:solidFill>
           <a:srgbClr val="000000"/>
         </a:solidFill>
@@ -172,7 +172,7 @@
         <a:srgbClr val="000000"/>
       </a:buClr>
       <a:buFont typeface="Arial"/>
-      <a:defRPr b="0" i="0" sz="1400" u="none" cap="none" strike="noStrike">
+      <a:defRPr b="0" i="0" spc="0" sz="1400" u="none" cap="none" strike="noStrike">
         <a:solidFill>
           <a:srgbClr val="000000"/>
         </a:solidFill>
@@ -196,7 +196,7 @@
         <a:srgbClr val="000000"/>
       </a:buClr>
       <a:buFont typeface="Arial"/>
-      <a:defRPr b="0" i="0" sz="1400" u="none" cap="none" strike="noStrike">
+      <a:defRPr b="0" i="0" spc="0" sz="1400" u="none" cap="none" strike="noStrike">
         <a:solidFill>
           <a:srgbClr val="000000"/>
         </a:solidFill>
@@ -220,7 +220,7 @@
         <a:srgbClr val="000000"/>
       </a:buClr>
       <a:buFont typeface="Arial"/>
-      <a:defRPr b="0" i="0" sz="1400" u="none" cap="none" strike="noStrike">
+      <a:defRPr b="0" i="0" spc="0" sz="1400" u="none" cap="none" strike="noStrike">
         <a:solidFill>
           <a:srgbClr val="000000"/>
         </a:solidFill>
@@ -244,7 +244,7 @@
         <a:srgbClr val="000000"/>
       </a:buClr>
       <a:buFont typeface="Arial"/>
-      <a:defRPr b="0" i="0" sz="1400" u="none" cap="none" strike="noStrike">
+      <a:defRPr b="0" i="0" spc="0" sz="1400" u="none" cap="none" strike="noStrike">
         <a:solidFill>
           <a:srgbClr val="000000"/>
         </a:solidFill>
@@ -268,7 +268,7 @@
         <a:srgbClr val="000000"/>
       </a:buClr>
       <a:buFont typeface="Arial"/>
-      <a:defRPr b="0" i="0" sz="1400" u="none" cap="none" strike="noStrike">
+      <a:defRPr b="0" i="0" spc="0" sz="1400" u="none" cap="none" strike="noStrike">
         <a:solidFill>
           <a:srgbClr val="000000"/>
         </a:solidFill>
@@ -292,7 +292,7 @@
         <a:srgbClr val="000000"/>
       </a:buClr>
       <a:buFont typeface="Arial"/>
-      <a:defRPr b="0" i="0" sz="1400" u="none" cap="none" strike="noStrike">
+      <a:defRPr b="0" i="0" spc="0" sz="1400" u="none" cap="none" strike="noStrike">
         <a:solidFill>
           <a:srgbClr val="000000"/>
         </a:solidFill>
@@ -542,7 +542,7 @@
         <a:srgbClr val="000000"/>
       </a:buClr>
       <a:buFont typeface="Arial"/>
-      <a:defRPr b="0" i="0" sz="1400" u="none" cap="none" strike="noStrike">
+      <a:defRPr b="0" i="0" spc="0" sz="1400" u="none" cap="none" strike="noStrike">
         <a:solidFill>
           <a:srgbClr val="000000"/>
         </a:solidFill>
@@ -566,7 +566,7 @@
         <a:srgbClr val="000000"/>
       </a:buClr>
       <a:buFont typeface="Arial"/>
-      <a:defRPr b="0" i="0" sz="1400" u="none" cap="none" strike="noStrike">
+      <a:defRPr b="0" i="0" spc="0" sz="1400" u="none" cap="none" strike="noStrike">
         <a:solidFill>
           <a:srgbClr val="000000"/>
         </a:solidFill>
@@ -590,7 +590,7 @@
         <a:srgbClr val="000000"/>
       </a:buClr>
       <a:buFont typeface="Arial"/>
-      <a:defRPr b="0" i="0" sz="1400" u="none" cap="none" strike="noStrike">
+      <a:defRPr b="0" i="0" spc="0" sz="1400" u="none" cap="none" strike="noStrike">
         <a:solidFill>
           <a:srgbClr val="000000"/>
         </a:solidFill>
@@ -614,7 +614,7 @@
         <a:srgbClr val="000000"/>
       </a:buClr>
       <a:buFont typeface="Arial"/>
-      <a:defRPr b="0" i="0" sz="1400" u="none" cap="none" strike="noStrike">
+      <a:defRPr b="0" i="0" spc="0" sz="1400" u="none" cap="none" strike="noStrike">
         <a:solidFill>
           <a:srgbClr val="000000"/>
         </a:solidFill>
@@ -638,7 +638,7 @@
         <a:srgbClr val="000000"/>
       </a:buClr>
       <a:buFont typeface="Arial"/>
-      <a:defRPr b="0" i="0" sz="1400" u="none" cap="none" strike="noStrike">
+      <a:defRPr b="0" i="0" spc="0" sz="1400" u="none" cap="none" strike="noStrike">
         <a:solidFill>
           <a:srgbClr val="000000"/>
         </a:solidFill>
@@ -662,7 +662,7 @@
         <a:srgbClr val="000000"/>
       </a:buClr>
       <a:buFont typeface="Arial"/>
-      <a:defRPr b="0" i="0" sz="1400" u="none" cap="none" strike="noStrike">
+      <a:defRPr b="0" i="0" spc="0" sz="1400" u="none" cap="none" strike="noStrike">
         <a:solidFill>
           <a:srgbClr val="000000"/>
         </a:solidFill>
@@ -686,7 +686,7 @@
         <a:srgbClr val="000000"/>
       </a:buClr>
       <a:buFont typeface="Arial"/>
-      <a:defRPr b="0" i="0" sz="1400" u="none" cap="none" strike="noStrike">
+      <a:defRPr b="0" i="0" spc="0" sz="1400" u="none" cap="none" strike="noStrike">
         <a:solidFill>
           <a:srgbClr val="000000"/>
         </a:solidFill>
@@ -710,7 +710,7 @@
         <a:srgbClr val="000000"/>
       </a:buClr>
       <a:buFont typeface="Arial"/>
-      <a:defRPr b="0" i="0" sz="1400" u="none" cap="none" strike="noStrike">
+      <a:defRPr b="0" i="0" spc="0" sz="1400" u="none" cap="none" strike="noStrike">
         <a:solidFill>
           <a:srgbClr val="000000"/>
         </a:solidFill>
@@ -734,7 +734,7 @@
         <a:srgbClr val="000000"/>
       </a:buClr>
       <a:buFont typeface="Arial"/>
-      <a:defRPr b="0" i="0" sz="1400" u="none" cap="none" strike="noStrike">
+      <a:defRPr b="0" i="0" spc="0" sz="1400" u="none" cap="none" strike="noStrike">
         <a:solidFill>
           <a:srgbClr val="000000"/>
         </a:solidFill>
@@ -12446,7 +12446,7 @@
           <a:srgbClr val="000000"/>
         </a:buClr>
         <a:buFont typeface="Arial"/>
-        <a:defRPr b="0" i="0" sz="1400" u="none" cap="none" strike="noStrike">
+        <a:defRPr b="0" i="0" spc="0" sz="1400" u="none" cap="none" strike="noStrike">
           <a:solidFill>
             <a:srgbClr val="000000"/>
           </a:solidFill>
@@ -12470,7 +12470,7 @@
           <a:srgbClr val="000000"/>
         </a:buClr>
         <a:buFont typeface="Arial"/>
-        <a:defRPr b="0" i="0" sz="1400" u="none" cap="none" strike="noStrike">
+        <a:defRPr b="0" i="0" spc="0" sz="1400" u="none" cap="none" strike="noStrike">
           <a:solidFill>
             <a:srgbClr val="000000"/>
           </a:solidFill>
@@ -12494,7 +12494,7 @@
           <a:srgbClr val="000000"/>
         </a:buClr>
         <a:buFont typeface="Arial"/>
-        <a:defRPr b="0" i="0" sz="1400" u="none" cap="none" strike="noStrike">
+        <a:defRPr b="0" i="0" spc="0" sz="1400" u="none" cap="none" strike="noStrike">
           <a:solidFill>
             <a:srgbClr val="000000"/>
           </a:solidFill>
@@ -12518,7 +12518,7 @@
           <a:srgbClr val="000000"/>
         </a:buClr>
         <a:buFont typeface="Arial"/>
-        <a:defRPr b="0" i="0" sz="1400" u="none" cap="none" strike="noStrike">
+        <a:defRPr b="0" i="0" spc="0" sz="1400" u="none" cap="none" strike="noStrike">
           <a:solidFill>
             <a:srgbClr val="000000"/>
           </a:solidFill>
@@ -12542,7 +12542,7 @@
           <a:srgbClr val="000000"/>
         </a:buClr>
         <a:buFont typeface="Arial"/>
-        <a:defRPr b="0" i="0" sz="1400" u="none" cap="none" strike="noStrike">
+        <a:defRPr b="0" i="0" spc="0" sz="1400" u="none" cap="none" strike="noStrike">
           <a:solidFill>
             <a:srgbClr val="000000"/>
           </a:solidFill>
@@ -12566,7 +12566,7 @@
           <a:srgbClr val="000000"/>
         </a:buClr>
         <a:buFont typeface="Arial"/>
-        <a:defRPr b="0" i="0" sz="1400" u="none" cap="none" strike="noStrike">
+        <a:defRPr b="0" i="0" spc="0" sz="1400" u="none" cap="none" strike="noStrike">
           <a:solidFill>
             <a:srgbClr val="000000"/>
           </a:solidFill>
@@ -12590,7 +12590,7 @@
           <a:srgbClr val="000000"/>
         </a:buClr>
         <a:buFont typeface="Arial"/>
-        <a:defRPr b="0" i="0" sz="1400" u="none" cap="none" strike="noStrike">
+        <a:defRPr b="0" i="0" spc="0" sz="1400" u="none" cap="none" strike="noStrike">
           <a:solidFill>
             <a:srgbClr val="000000"/>
           </a:solidFill>
@@ -12614,7 +12614,7 @@
           <a:srgbClr val="000000"/>
         </a:buClr>
         <a:buFont typeface="Arial"/>
-        <a:defRPr b="0" i="0" sz="1400" u="none" cap="none" strike="noStrike">
+        <a:defRPr b="0" i="0" spc="0" sz="1400" u="none" cap="none" strike="noStrike">
           <a:solidFill>
             <a:srgbClr val="000000"/>
           </a:solidFill>
@@ -12638,7 +12638,7 @@
           <a:srgbClr val="000000"/>
         </a:buClr>
         <a:buFont typeface="Arial"/>
-        <a:defRPr b="0" i="0" sz="1400" u="none" cap="none" strike="noStrike">
+        <a:defRPr b="0" i="0" spc="0" sz="1400" u="none" cap="none" strike="noStrike">
           <a:solidFill>
             <a:srgbClr val="000000"/>
           </a:solidFill>
@@ -12675,7 +12675,7 @@
           <a:srgbClr val="000000"/>
         </a:buClr>
         <a:buFont typeface="Arial"/>
-        <a:defRPr b="0" i="0" sz="1400" u="none" cap="none" strike="noStrike">
+        <a:defRPr b="0" i="0" spc="0" sz="1400" u="none" cap="none" strike="noStrike">
           <a:solidFill>
             <a:srgbClr val="000000"/>
           </a:solidFill>
@@ -12699,7 +12699,7 @@
           <a:srgbClr val="000000"/>
         </a:buClr>
         <a:buFont typeface="Arial"/>
-        <a:defRPr b="0" i="0" sz="1400" u="none" cap="none" strike="noStrike">
+        <a:defRPr b="0" i="0" spc="0" sz="1400" u="none" cap="none" strike="noStrike">
           <a:solidFill>
             <a:srgbClr val="000000"/>
           </a:solidFill>
@@ -12723,7 +12723,7 @@
           <a:srgbClr val="000000"/>
         </a:buClr>
         <a:buFont typeface="Arial"/>
-        <a:defRPr b="0" i="0" sz="1400" u="none" cap="none" strike="noStrike">
+        <a:defRPr b="0" i="0" spc="0" sz="1400" u="none" cap="none" strike="noStrike">
           <a:solidFill>
             <a:srgbClr val="000000"/>
           </a:solidFill>
@@ -12747,7 +12747,7 @@
           <a:srgbClr val="000000"/>
         </a:buClr>
         <a:buFont typeface="Arial"/>
-        <a:defRPr b="0" i="0" sz="1400" u="none" cap="none" strike="noStrike">
+        <a:defRPr b="0" i="0" spc="0" sz="1400" u="none" cap="none" strike="noStrike">
           <a:solidFill>
             <a:srgbClr val="000000"/>
           </a:solidFill>
@@ -12771,7 +12771,7 @@
           <a:srgbClr val="000000"/>
         </a:buClr>
         <a:buFont typeface="Arial"/>
-        <a:defRPr b="0" i="0" sz="1400" u="none" cap="none" strike="noStrike">
+        <a:defRPr b="0" i="0" spc="0" sz="1400" u="none" cap="none" strike="noStrike">
           <a:solidFill>
             <a:srgbClr val="000000"/>
           </a:solidFill>
@@ -12795,7 +12795,7 @@
           <a:srgbClr val="000000"/>
         </a:buClr>
         <a:buFont typeface="Arial"/>
-        <a:defRPr b="0" i="0" sz="1400" u="none" cap="none" strike="noStrike">
+        <a:defRPr b="0" i="0" spc="0" sz="1400" u="none" cap="none" strike="noStrike">
           <a:solidFill>
             <a:srgbClr val="000000"/>
           </a:solidFill>
@@ -12819,7 +12819,7 @@
           <a:srgbClr val="000000"/>
         </a:buClr>
         <a:buFont typeface="Arial"/>
-        <a:defRPr b="0" i="0" sz="1400" u="none" cap="none" strike="noStrike">
+        <a:defRPr b="0" i="0" spc="0" sz="1400" u="none" cap="none" strike="noStrike">
           <a:solidFill>
             <a:srgbClr val="000000"/>
           </a:solidFill>
@@ -12843,7 +12843,7 @@
           <a:srgbClr val="000000"/>
         </a:buClr>
         <a:buFont typeface="Arial"/>
-        <a:defRPr b="0" i="0" sz="1400" u="none" cap="none" strike="noStrike">
+        <a:defRPr b="0" i="0" spc="0" sz="1400" u="none" cap="none" strike="noStrike">
           <a:solidFill>
             <a:srgbClr val="000000"/>
           </a:solidFill>
@@ -12867,7 +12867,7 @@
           <a:srgbClr val="000000"/>
         </a:buClr>
         <a:buFont typeface="Arial"/>
-        <a:defRPr b="0" i="0" sz="1400" u="none" cap="none" strike="noStrike">
+        <a:defRPr b="0" i="0" spc="0" sz="1400" u="none" cap="none" strike="noStrike">
           <a:solidFill>
             <a:srgbClr val="000000"/>
           </a:solidFill>
@@ -12904,7 +12904,7 @@
           <a:srgbClr val="000000"/>
         </a:buClr>
         <a:buFont typeface="Arial"/>
-        <a:defRPr b="0" i="0" sz="1400" u="none" cap="none" strike="noStrike">
+        <a:defRPr b="0" i="0" spc="0" sz="1400" u="none" cap="none" strike="noStrike">
           <a:solidFill>
             <a:srgbClr val="000000"/>
           </a:solidFill>
@@ -12928,7 +12928,7 @@
           <a:srgbClr val="000000"/>
         </a:buClr>
         <a:buFont typeface="Arial"/>
-        <a:defRPr b="0" i="0" sz="1400" u="none" cap="none" strike="noStrike">
+        <a:defRPr b="0" i="0" spc="0" sz="1400" u="none" cap="none" strike="noStrike">
           <a:solidFill>
             <a:srgbClr val="000000"/>
           </a:solidFill>
@@ -12952,7 +12952,7 @@
           <a:srgbClr val="000000"/>
         </a:buClr>
         <a:buFont typeface="Arial"/>
-        <a:defRPr b="0" i="0" sz="1400" u="none" cap="none" strike="noStrike">
+        <a:defRPr b="0" i="0" spc="0" sz="1400" u="none" cap="none" strike="noStrike">
           <a:solidFill>
             <a:srgbClr val="000000"/>
           </a:solidFill>
@@ -12976,7 +12976,7 @@
           <a:srgbClr val="000000"/>
         </a:buClr>
         <a:buFont typeface="Arial"/>
-        <a:defRPr b="0" i="0" sz="1400" u="none" cap="none" strike="noStrike">
+        <a:defRPr b="0" i="0" spc="0" sz="1400" u="none" cap="none" strike="noStrike">
           <a:solidFill>
             <a:srgbClr val="000000"/>
           </a:solidFill>
@@ -13000,7 +13000,7 @@
           <a:srgbClr val="000000"/>
         </a:buClr>
         <a:buFont typeface="Arial"/>
-        <a:defRPr b="0" i="0" sz="1400" u="none" cap="none" strike="noStrike">
+        <a:defRPr b="0" i="0" spc="0" sz="1400" u="none" cap="none" strike="noStrike">
           <a:solidFill>
             <a:srgbClr val="000000"/>
           </a:solidFill>
@@ -13024,7 +13024,7 @@
           <a:srgbClr val="000000"/>
         </a:buClr>
         <a:buFont typeface="Arial"/>
-        <a:defRPr b="0" i="0" sz="1400" u="none" cap="none" strike="noStrike">
+        <a:defRPr b="0" i="0" spc="0" sz="1400" u="none" cap="none" strike="noStrike">
           <a:solidFill>
             <a:srgbClr val="000000"/>
           </a:solidFill>
@@ -13048,7 +13048,7 @@
           <a:srgbClr val="000000"/>
         </a:buClr>
         <a:buFont typeface="Arial"/>
-        <a:defRPr b="0" i="0" sz="1400" u="none" cap="none" strike="noStrike">
+        <a:defRPr b="0" i="0" spc="0" sz="1400" u="none" cap="none" strike="noStrike">
           <a:solidFill>
             <a:srgbClr val="000000"/>
           </a:solidFill>
@@ -13072,7 +13072,7 @@
           <a:srgbClr val="000000"/>
         </a:buClr>
         <a:buFont typeface="Arial"/>
-        <a:defRPr b="0" i="0" sz="1400" u="none" cap="none" strike="noStrike">
+        <a:defRPr b="0" i="0" spc="0" sz="1400" u="none" cap="none" strike="noStrike">
           <a:solidFill>
             <a:srgbClr val="000000"/>
           </a:solidFill>
@@ -13096,7 +13096,7 @@
           <a:srgbClr val="000000"/>
         </a:buClr>
         <a:buFont typeface="Arial"/>
-        <a:defRPr b="0" i="0" sz="1400" u="none" cap="none" strike="noStrike">
+        <a:defRPr b="0" i="0" spc="0" sz="1400" u="none" cap="none" strike="noStrike">
           <a:solidFill>
             <a:srgbClr val="000000"/>
           </a:solidFill>
@@ -13727,7 +13727,7 @@
           <a:srgbClr val="000000"/>
         </a:buClr>
         <a:buFont typeface="Arial"/>
-        <a:defRPr b="0" i="0" sz="1400" u="none" cap="none" strike="noStrike">
+        <a:defRPr b="0" i="0" spc="0" sz="1400" u="none" cap="none" strike="noStrike">
           <a:solidFill>
             <a:srgbClr val="000000"/>
           </a:solidFill>
@@ -13751,7 +13751,7 @@
           <a:srgbClr val="000000"/>
         </a:buClr>
         <a:buFont typeface="Arial"/>
-        <a:defRPr b="0" i="0" sz="1400" u="none" cap="none" strike="noStrike">
+        <a:defRPr b="0" i="0" spc="0" sz="1400" u="none" cap="none" strike="noStrike">
           <a:solidFill>
             <a:srgbClr val="000000"/>
           </a:solidFill>
@@ -13775,7 +13775,7 @@
           <a:srgbClr val="000000"/>
         </a:buClr>
         <a:buFont typeface="Arial"/>
-        <a:defRPr b="0" i="0" sz="1400" u="none" cap="none" strike="noStrike">
+        <a:defRPr b="0" i="0" spc="0" sz="1400" u="none" cap="none" strike="noStrike">
           <a:solidFill>
             <a:srgbClr val="000000"/>
           </a:solidFill>
@@ -13799,7 +13799,7 @@
           <a:srgbClr val="000000"/>
         </a:buClr>
         <a:buFont typeface="Arial"/>
-        <a:defRPr b="0" i="0" sz="1400" u="none" cap="none" strike="noStrike">
+        <a:defRPr b="0" i="0" spc="0" sz="1400" u="none" cap="none" strike="noStrike">
           <a:solidFill>
             <a:srgbClr val="000000"/>
           </a:solidFill>
@@ -13823,7 +13823,7 @@
           <a:srgbClr val="000000"/>
         </a:buClr>
         <a:buFont typeface="Arial"/>
-        <a:defRPr b="0" i="0" sz="1400" u="none" cap="none" strike="noStrike">
+        <a:defRPr b="0" i="0" spc="0" sz="1400" u="none" cap="none" strike="noStrike">
           <a:solidFill>
             <a:srgbClr val="000000"/>
           </a:solidFill>
@@ -13847,7 +13847,7 @@
           <a:srgbClr val="000000"/>
         </a:buClr>
         <a:buFont typeface="Arial"/>
-        <a:defRPr b="0" i="0" sz="1400" u="none" cap="none" strike="noStrike">
+        <a:defRPr b="0" i="0" spc="0" sz="1400" u="none" cap="none" strike="noStrike">
           <a:solidFill>
             <a:srgbClr val="000000"/>
           </a:solidFill>
@@ -13871,7 +13871,7 @@
           <a:srgbClr val="000000"/>
         </a:buClr>
         <a:buFont typeface="Arial"/>
-        <a:defRPr b="0" i="0" sz="1400" u="none" cap="none" strike="noStrike">
+        <a:defRPr b="0" i="0" spc="0" sz="1400" u="none" cap="none" strike="noStrike">
           <a:solidFill>
             <a:srgbClr val="000000"/>
           </a:solidFill>
@@ -13895,7 +13895,7 @@
           <a:srgbClr val="000000"/>
         </a:buClr>
         <a:buFont typeface="Arial"/>
-        <a:defRPr b="0" i="0" sz="1400" u="none" cap="none" strike="noStrike">
+        <a:defRPr b="0" i="0" spc="0" sz="1400" u="none" cap="none" strike="noStrike">
           <a:solidFill>
             <a:srgbClr val="000000"/>
           </a:solidFill>
@@ -13919,7 +13919,7 @@
           <a:srgbClr val="000000"/>
         </a:buClr>
         <a:buFont typeface="Arial"/>
-        <a:defRPr b="0" i="0" sz="1400" u="none" cap="none" strike="noStrike">
+        <a:defRPr b="0" i="0" spc="0" sz="1400" u="none" cap="none" strike="noStrike">
           <a:solidFill>
             <a:srgbClr val="000000"/>
           </a:solidFill>
@@ -13956,7 +13956,7 @@
           <a:srgbClr val="000000"/>
         </a:buClr>
         <a:buFont typeface="Arial"/>
-        <a:defRPr b="0" i="0" sz="1400" u="none" cap="none" strike="noStrike">
+        <a:defRPr b="0" i="0" spc="0" sz="1400" u="none" cap="none" strike="noStrike">
           <a:solidFill>
             <a:srgbClr val="000000"/>
           </a:solidFill>
@@ -13980,7 +13980,7 @@
           <a:srgbClr val="000000"/>
         </a:buClr>
         <a:buFont typeface="Arial"/>
-        <a:defRPr b="0" i="0" sz="1400" u="none" cap="none" strike="noStrike">
+        <a:defRPr b="0" i="0" spc="0" sz="1400" u="none" cap="none" strike="noStrike">
           <a:solidFill>
             <a:srgbClr val="000000"/>
           </a:solidFill>
@@ -14004,7 +14004,7 @@
           <a:srgbClr val="000000"/>
         </a:buClr>
         <a:buFont typeface="Arial"/>
-        <a:defRPr b="0" i="0" sz="1400" u="none" cap="none" strike="noStrike">
+        <a:defRPr b="0" i="0" spc="0" sz="1400" u="none" cap="none" strike="noStrike">
           <a:solidFill>
             <a:srgbClr val="000000"/>
           </a:solidFill>
@@ -14028,7 +14028,7 @@
           <a:srgbClr val="000000"/>
         </a:buClr>
         <a:buFont typeface="Arial"/>
-        <a:defRPr b="0" i="0" sz="1400" u="none" cap="none" strike="noStrike">
+        <a:defRPr b="0" i="0" spc="0" sz="1400" u="none" cap="none" strike="noStrike">
           <a:solidFill>
             <a:srgbClr val="000000"/>
           </a:solidFill>
@@ -14052,7 +14052,7 @@
           <a:srgbClr val="000000"/>
         </a:buClr>
         <a:buFont typeface="Arial"/>
-        <a:defRPr b="0" i="0" sz="1400" u="none" cap="none" strike="noStrike">
+        <a:defRPr b="0" i="0" spc="0" sz="1400" u="none" cap="none" strike="noStrike">
           <a:solidFill>
             <a:srgbClr val="000000"/>
           </a:solidFill>
@@ -14076,7 +14076,7 @@
           <a:srgbClr val="000000"/>
         </a:buClr>
         <a:buFont typeface="Arial"/>
-        <a:defRPr b="0" i="0" sz="1400" u="none" cap="none" strike="noStrike">
+        <a:defRPr b="0" i="0" spc="0" sz="1400" u="none" cap="none" strike="noStrike">
           <a:solidFill>
             <a:srgbClr val="000000"/>
           </a:solidFill>
@@ -14100,7 +14100,7 @@
           <a:srgbClr val="000000"/>
         </a:buClr>
         <a:buFont typeface="Arial"/>
-        <a:defRPr b="0" i="0" sz="1400" u="none" cap="none" strike="noStrike">
+        <a:defRPr b="0" i="0" spc="0" sz="1400" u="none" cap="none" strike="noStrike">
           <a:solidFill>
             <a:srgbClr val="000000"/>
           </a:solidFill>
@@ -14124,7 +14124,7 @@
           <a:srgbClr val="000000"/>
         </a:buClr>
         <a:buFont typeface="Arial"/>
-        <a:defRPr b="0" i="0" sz="1400" u="none" cap="none" strike="noStrike">
+        <a:defRPr b="0" i="0" spc="0" sz="1400" u="none" cap="none" strike="noStrike">
           <a:solidFill>
             <a:srgbClr val="000000"/>
           </a:solidFill>
@@ -14148,7 +14148,7 @@
           <a:srgbClr val="000000"/>
         </a:buClr>
         <a:buFont typeface="Arial"/>
-        <a:defRPr b="0" i="0" sz="1400" u="none" cap="none" strike="noStrike">
+        <a:defRPr b="0" i="0" spc="0" sz="1400" u="none" cap="none" strike="noStrike">
           <a:solidFill>
             <a:srgbClr val="000000"/>
           </a:solidFill>
@@ -14185,7 +14185,7 @@
           <a:srgbClr val="000000"/>
         </a:buClr>
         <a:buFont typeface="Arial"/>
-        <a:defRPr b="0" i="0" sz="1400" u="none" cap="none" strike="noStrike">
+        <a:defRPr b="0" i="0" spc="0" sz="1400" u="none" cap="none" strike="noStrike">
           <a:solidFill>
             <a:srgbClr val="000000"/>
           </a:solidFill>
@@ -14209,7 +14209,7 @@
           <a:srgbClr val="000000"/>
         </a:buClr>
         <a:buFont typeface="Arial"/>
-        <a:defRPr b="0" i="0" sz="1400" u="none" cap="none" strike="noStrike">
+        <a:defRPr b="0" i="0" spc="0" sz="1400" u="none" cap="none" strike="noStrike">
           <a:solidFill>
             <a:srgbClr val="000000"/>
           </a:solidFill>
@@ -14233,7 +14233,7 @@
           <a:srgbClr val="000000"/>
         </a:buClr>
         <a:buFont typeface="Arial"/>
-        <a:defRPr b="0" i="0" sz="1400" u="none" cap="none" strike="noStrike">
+        <a:defRPr b="0" i="0" spc="0" sz="1400" u="none" cap="none" strike="noStrike">
           <a:solidFill>
             <a:srgbClr val="000000"/>
           </a:solidFill>
@@ -14257,7 +14257,7 @@
           <a:srgbClr val="000000"/>
         </a:buClr>
         <a:buFont typeface="Arial"/>
-        <a:defRPr b="0" i="0" sz="1400" u="none" cap="none" strike="noStrike">
+        <a:defRPr b="0" i="0" spc="0" sz="1400" u="none" cap="none" strike="noStrike">
           <a:solidFill>
             <a:srgbClr val="000000"/>
           </a:solidFill>
@@ -14281,7 +14281,7 @@
           <a:srgbClr val="000000"/>
         </a:buClr>
         <a:buFont typeface="Arial"/>
-        <a:defRPr b="0" i="0" sz="1400" u="none" cap="none" strike="noStrike">
+        <a:defRPr b="0" i="0" spc="0" sz="1400" u="none" cap="none" strike="noStrike">
           <a:solidFill>
             <a:srgbClr val="000000"/>
           </a:solidFill>
@@ -14305,7 +14305,7 @@
           <a:srgbClr val="000000"/>
         </a:buClr>
         <a:buFont typeface="Arial"/>
-        <a:defRPr b="0" i="0" sz="1400" u="none" cap="none" strike="noStrike">
+        <a:defRPr b="0" i="0" spc="0" sz="1400" u="none" cap="none" strike="noStrike">
           <a:solidFill>
             <a:srgbClr val="000000"/>
           </a:solidFill>
@@ -14329,7 +14329,7 @@
           <a:srgbClr val="000000"/>
         </a:buClr>
         <a:buFont typeface="Arial"/>
-        <a:defRPr b="0" i="0" sz="1400" u="none" cap="none" strike="noStrike">
+        <a:defRPr b="0" i="0" spc="0" sz="1400" u="none" cap="none" strike="noStrike">
           <a:solidFill>
             <a:srgbClr val="000000"/>
           </a:solidFill>
@@ -14353,7 +14353,7 @@
           <a:srgbClr val="000000"/>
         </a:buClr>
         <a:buFont typeface="Arial"/>
-        <a:defRPr b="0" i="0" sz="1400" u="none" cap="none" strike="noStrike">
+        <a:defRPr b="0" i="0" spc="0" sz="1400" u="none" cap="none" strike="noStrike">
           <a:solidFill>
             <a:srgbClr val="000000"/>
           </a:solidFill>
@@ -14377,7 +14377,7 @@
           <a:srgbClr val="000000"/>
         </a:buClr>
         <a:buFont typeface="Arial"/>
-        <a:defRPr b="0" i="0" sz="1400" u="none" cap="none" strike="noStrike">
+        <a:defRPr b="0" i="0" spc="0" sz="1400" u="none" cap="none" strike="noStrike">
           <a:solidFill>
             <a:srgbClr val="000000"/>
           </a:solidFill>
@@ -17605,7 +17605,7 @@
             <a:tbl>
               <a:tblPr>
                 <a:noFill/>
-                <a:tableStyleId>{666AA95A-A93B-462D-889F-7D251E3C9532}</a:tableStyleId>
+                <a:tableStyleId>{2B58D373-DADC-4591-8A63-80A69A191207}</a:tableStyleId>
               </a:tblPr>
               <a:tblGrid>
                 <a:gridCol w="524750"/>
@@ -21626,7 +21626,7 @@
             <a:tbl>
               <a:tblPr>
                 <a:noFill/>
-                <a:tableStyleId>{1080B285-DD26-4382-9D89-CEF7B5E0849D}</a:tableStyleId>
+                <a:tableStyleId>{27AAE8F7-F3DE-4B79-A8AB-9F057D2256F2}</a:tableStyleId>
               </a:tblPr>
               <a:tblGrid>
                 <a:gridCol w="2148850"/>
@@ -32845,6 +32845,285 @@
 </file>
 
 <file path=ppt/theme/theme2.xml><?xml version="1.0" encoding="utf-8"?>
+<a:theme xmlns:a="http://schemas.openxmlformats.org/drawingml/2006/main" xmlns:r="http://schemas.openxmlformats.org/officeDocument/2006/relationships" name="POSS Slides Template">
+  <a:themeElements>
+    <a:clrScheme name="Simple Light">
+      <a:dk1>
+        <a:srgbClr val="000000"/>
+      </a:dk1>
+      <a:lt1>
+        <a:srgbClr val="FFFFFF"/>
+      </a:lt1>
+      <a:dk2>
+        <a:srgbClr val="404040"/>
+      </a:dk2>
+      <a:lt2>
+        <a:srgbClr val="808080"/>
+      </a:lt2>
+      <a:accent1>
+        <a:srgbClr val="D0D0D0"/>
+      </a:accent1>
+      <a:accent2>
+        <a:srgbClr val="4169E1"/>
+      </a:accent2>
+      <a:accent3>
+        <a:srgbClr val="4CAF50"/>
+      </a:accent3>
+      <a:accent4>
+        <a:srgbClr val="FEB612"/>
+      </a:accent4>
+      <a:accent5>
+        <a:srgbClr val="F36838"/>
+      </a:accent5>
+      <a:accent6>
+        <a:srgbClr val="8E44AD"/>
+      </a:accent6>
+      <a:hlink>
+        <a:srgbClr val="1E90FF"/>
+      </a:hlink>
+      <a:folHlink>
+        <a:srgbClr val="0097A7"/>
+      </a:folHlink>
+    </a:clrScheme>
+    <a:fontScheme name="Office">
+      <a:majorFont>
+        <a:latin typeface="Arial"/>
+        <a:ea typeface=""/>
+        <a:cs typeface=""/>
+        <a:font script="Jpan" typeface="ＭＳ Ｐゴシック"/>
+        <a:font script="Hang" typeface="맑은 고딕"/>
+        <a:font script="Hans" typeface="宋体"/>
+        <a:font script="Hant" typeface="新細明體"/>
+        <a:font script="Arab" typeface="Times New Roman"/>
+        <a:font script="Hebr" typeface="Times New Roman"/>
+        <a:font script="Thai" typeface="Angsana New"/>
+        <a:font script="Ethi" typeface="Nyala"/>
+        <a:font script="Beng" typeface="Vrinda"/>
+        <a:font script="Gujr" typeface="Shruti"/>
+        <a:font script="Khmr" typeface="MoolBoran"/>
+        <a:font script="Knda" typeface="Tunga"/>
+        <a:font script="Guru" typeface="Raavi"/>
+        <a:font script="Cans" typeface="Euphemia"/>
+        <a:font script="Cher" typeface="Plantagenet Cherokee"/>
+        <a:font script="Yiii" typeface="Microsoft Yi Baiti"/>
+        <a:font script="Tibt" typeface="Microsoft Himalaya"/>
+        <a:font script="Thaa" typeface="MV Boli"/>
+        <a:font script="Deva" typeface="Mangal"/>
+        <a:font script="Telu" typeface="Gautami"/>
+        <a:font script="Taml" typeface="Latha"/>
+        <a:font script="Syrc" typeface="Estrangelo Edessa"/>
+        <a:font script="Orya" typeface="Kalinga"/>
+        <a:font script="Mlym" typeface="Kartika"/>
+        <a:font script="Laoo" typeface="DokChampa"/>
+        <a:font script="Sinh" typeface="Iskoola Pota"/>
+        <a:font script="Mong" typeface="Mongolian Baiti"/>
+        <a:font script="Viet" typeface="Times New Roman"/>
+        <a:font script="Uigh" typeface="Microsoft Uighur"/>
+        <a:font script="Geor" typeface="Sylfaen"/>
+      </a:majorFont>
+      <a:minorFont>
+        <a:latin typeface="Arial"/>
+        <a:ea typeface=""/>
+        <a:cs typeface=""/>
+        <a:font script="Jpan" typeface="ＭＳ Ｐゴシック"/>
+        <a:font script="Hang" typeface="맑은 고딕"/>
+        <a:font script="Hans" typeface="宋体"/>
+        <a:font script="Hant" typeface="新細明體"/>
+        <a:font script="Arab" typeface="Arial"/>
+        <a:font script="Hebr" typeface="Arial"/>
+        <a:font script="Thai" typeface="Cordia New"/>
+        <a:font script="Ethi" typeface="Nyala"/>
+        <a:font script="Beng" typeface="Vrinda"/>
+        <a:font script="Gujr" typeface="Shruti"/>
+        <a:font script="Khmr" typeface="DaunPenh"/>
+        <a:font script="Knda" typeface="Tunga"/>
+        <a:font script="Guru" typeface="Raavi"/>
+        <a:font script="Cans" typeface="Euphemia"/>
+        <a:font script="Cher" typeface="Plantagenet Cherokee"/>
+        <a:font script="Yiii" typeface="Microsoft Yi Baiti"/>
+        <a:font script="Tibt" typeface="Microsoft Himalaya"/>
+        <a:font script="Thaa" typeface="MV Boli"/>
+        <a:font script="Deva" typeface="Mangal"/>
+        <a:font script="Telu" typeface="Gautami"/>
+        <a:font script="Taml" typeface="Latha"/>
+        <a:font script="Syrc" typeface="Estrangelo Edessa"/>
+        <a:font script="Orya" typeface="Kalinga"/>
+        <a:font script="Mlym" typeface="Kartika"/>
+        <a:font script="Laoo" typeface="DokChampa"/>
+        <a:font script="Sinh" typeface="Iskoola Pota"/>
+        <a:font script="Mong" typeface="Mongolian Baiti"/>
+        <a:font script="Viet" typeface="Arial"/>
+        <a:font script="Uigh" typeface="Microsoft Uighur"/>
+        <a:font script="Geor" typeface="Sylfaen"/>
+      </a:minorFont>
+    </a:fontScheme>
+    <a:fmtScheme name="Office">
+      <a:fillStyleLst>
+        <a:solidFill>
+          <a:schemeClr val="phClr"/>
+        </a:solidFill>
+        <a:gradFill rotWithShape="1">
+          <a:gsLst>
+            <a:gs pos="0">
+              <a:schemeClr val="phClr">
+                <a:tint val="50000"/>
+                <a:satMod val="300000"/>
+              </a:schemeClr>
+            </a:gs>
+            <a:gs pos="35000">
+              <a:schemeClr val="phClr">
+                <a:tint val="37000"/>
+                <a:satMod val="300000"/>
+              </a:schemeClr>
+            </a:gs>
+            <a:gs pos="100000">
+              <a:schemeClr val="phClr">
+                <a:tint val="15000"/>
+                <a:satMod val="350000"/>
+              </a:schemeClr>
+            </a:gs>
+          </a:gsLst>
+          <a:lin ang="16200000" scaled="1"/>
+        </a:gradFill>
+        <a:gradFill rotWithShape="1">
+          <a:gsLst>
+            <a:gs pos="0">
+              <a:schemeClr val="phClr">
+                <a:tint val="100000"/>
+                <a:shade val="100000"/>
+                <a:satMod val="130000"/>
+              </a:schemeClr>
+            </a:gs>
+            <a:gs pos="100000">
+              <a:schemeClr val="phClr">
+                <a:tint val="50000"/>
+                <a:shade val="100000"/>
+                <a:satMod val="350000"/>
+              </a:schemeClr>
+            </a:gs>
+          </a:gsLst>
+          <a:lin ang="16200000" scaled="0"/>
+        </a:gradFill>
+      </a:fillStyleLst>
+      <a:lnStyleLst>
+        <a:ln w="9525" cap="flat" cmpd="sng" algn="ctr">
+          <a:solidFill>
+            <a:schemeClr val="phClr">
+              <a:shade val="95000"/>
+              <a:satMod val="105000"/>
+            </a:schemeClr>
+          </a:solidFill>
+          <a:prstDash val="solid"/>
+        </a:ln>
+        <a:ln w="25400" cap="flat" cmpd="sng" algn="ctr">
+          <a:solidFill>
+            <a:schemeClr val="phClr"/>
+          </a:solidFill>
+          <a:prstDash val="solid"/>
+        </a:ln>
+        <a:ln w="38100" cap="flat" cmpd="sng" algn="ctr">
+          <a:solidFill>
+            <a:schemeClr val="phClr"/>
+          </a:solidFill>
+          <a:prstDash val="solid"/>
+        </a:ln>
+      </a:lnStyleLst>
+      <a:effectStyleLst>
+        <a:effectStyle>
+          <a:effectLst>
+            <a:outerShdw blurRad="40000" dist="20000" dir="5400000" rotWithShape="0">
+              <a:srgbClr val="000000">
+                <a:alpha val="38000"/>
+              </a:srgbClr>
+            </a:outerShdw>
+          </a:effectLst>
+        </a:effectStyle>
+        <a:effectStyle>
+          <a:effectLst>
+            <a:outerShdw blurRad="40000" dist="23000" dir="5400000" rotWithShape="0">
+              <a:srgbClr val="000000">
+                <a:alpha val="35000"/>
+              </a:srgbClr>
+            </a:outerShdw>
+          </a:effectLst>
+        </a:effectStyle>
+        <a:effectStyle>
+          <a:effectLst>
+            <a:outerShdw blurRad="40000" dist="23000" dir="5400000" rotWithShape="0">
+              <a:srgbClr val="000000">
+                <a:alpha val="35000"/>
+              </a:srgbClr>
+            </a:outerShdw>
+          </a:effectLst>
+          <a:scene3d>
+            <a:camera prst="orthographicFront">
+              <a:rot lat="0" lon="0" rev="0"/>
+            </a:camera>
+            <a:lightRig rig="threePt" dir="t">
+              <a:rot lat="0" lon="0" rev="1200000"/>
+            </a:lightRig>
+          </a:scene3d>
+          <a:sp3d>
+            <a:bevelT w="63500" h="25400"/>
+          </a:sp3d>
+        </a:effectStyle>
+      </a:effectStyleLst>
+      <a:bgFillStyleLst>
+        <a:solidFill>
+          <a:schemeClr val="phClr"/>
+        </a:solidFill>
+        <a:gradFill rotWithShape="1">
+          <a:gsLst>
+            <a:gs pos="0">
+              <a:schemeClr val="phClr">
+                <a:tint val="40000"/>
+                <a:satMod val="350000"/>
+              </a:schemeClr>
+            </a:gs>
+            <a:gs pos="40000">
+              <a:schemeClr val="phClr">
+                <a:tint val="45000"/>
+                <a:shade val="99000"/>
+                <a:satMod val="350000"/>
+              </a:schemeClr>
+            </a:gs>
+            <a:gs pos="100000">
+              <a:schemeClr val="phClr">
+                <a:shade val="20000"/>
+                <a:satMod val="255000"/>
+              </a:schemeClr>
+            </a:gs>
+          </a:gsLst>
+          <a:path path="circle">
+            <a:fillToRect l="50000" t="-80000" r="50000" b="180000"/>
+          </a:path>
+        </a:gradFill>
+        <a:gradFill rotWithShape="1">
+          <a:gsLst>
+            <a:gs pos="0">
+              <a:schemeClr val="phClr">
+                <a:tint val="80000"/>
+                <a:satMod val="300000"/>
+              </a:schemeClr>
+            </a:gs>
+            <a:gs pos="100000">
+              <a:schemeClr val="phClr">
+                <a:shade val="30000"/>
+                <a:satMod val="200000"/>
+              </a:schemeClr>
+            </a:gs>
+          </a:gsLst>
+          <a:path path="circle">
+            <a:fillToRect l="50000" t="50000" r="50000" b="50000"/>
+          </a:path>
+        </a:gradFill>
+      </a:bgFillStyleLst>
+    </a:fmtScheme>
+  </a:themeElements>
+</a:theme>
+</file>
+
+<file path=ppt/theme/theme3.xml><?xml version="1.0" encoding="utf-8"?>
 <a:theme xmlns:a="http://schemas.openxmlformats.org/drawingml/2006/main" xmlns:r="http://schemas.openxmlformats.org/officeDocument/2006/relationships">
   <a:themeElements>
     <a:clrScheme name="Default">
@@ -33121,283 +33400,4 @@
     </a:fmtScheme>
   </a:themeElements>
 </a:theme>
-</file>
-
-<file path=ppt/theme/theme3.xml><?xml version="1.0" encoding="utf-8"?>
-<a:theme xmlns:a="http://schemas.openxmlformats.org/drawingml/2006/main" xmlns:r="http://schemas.openxmlformats.org/officeDocument/2006/relationships" name="POSS Slides Template">
-  <a:themeElements>
-    <a:clrScheme name="Simple Light">
-      <a:dk1>
-        <a:srgbClr val="000000"/>
-      </a:dk1>
-      <a:lt1>
-        <a:srgbClr val="FFFFFF"/>
-      </a:lt1>
-      <a:dk2>
-        <a:srgbClr val="404040"/>
-      </a:dk2>
-      <a:lt2>
-        <a:srgbClr val="808080"/>
-      </a:lt2>
-      <a:accent1>
-        <a:srgbClr val="D0D0D0"/>
-      </a:accent1>
-      <a:accent2>
-        <a:srgbClr val="4169E1"/>
-      </a:accent2>
-      <a:accent3>
-        <a:srgbClr val="4CAF50"/>
-      </a:accent3>
-      <a:accent4>
-        <a:srgbClr val="FEB612"/>
-      </a:accent4>
-      <a:accent5>
-        <a:srgbClr val="F36838"/>
-      </a:accent5>
-      <a:accent6>
-        <a:srgbClr val="8E44AD"/>
-      </a:accent6>
-      <a:hlink>
-        <a:srgbClr val="1E90FF"/>
-      </a:hlink>
-      <a:folHlink>
-        <a:srgbClr val="0097A7"/>
-      </a:folHlink>
-    </a:clrScheme>
-    <a:fontScheme name="Office">
-      <a:majorFont>
-        <a:latin typeface="Arial"/>
-        <a:ea typeface=""/>
-        <a:cs typeface=""/>
-        <a:font script="Jpan" typeface="ＭＳ Ｐゴシック"/>
-        <a:font script="Hang" typeface="맑은 고딕"/>
-        <a:font script="Hans" typeface="宋体"/>
-        <a:font script="Hant" typeface="新細明體"/>
-        <a:font script="Arab" typeface="Times New Roman"/>
-        <a:font script="Hebr" typeface="Times New Roman"/>
-        <a:font script="Thai" typeface="Angsana New"/>
-        <a:font script="Ethi" typeface="Nyala"/>
-        <a:font script="Beng" typeface="Vrinda"/>
-        <a:font script="Gujr" typeface="Shruti"/>
-        <a:font script="Khmr" typeface="MoolBoran"/>
-        <a:font script="Knda" typeface="Tunga"/>
-        <a:font script="Guru" typeface="Raavi"/>
-        <a:font script="Cans" typeface="Euphemia"/>
-        <a:font script="Cher" typeface="Plantagenet Cherokee"/>
-        <a:font script="Yiii" typeface="Microsoft Yi Baiti"/>
-        <a:font script="Tibt" typeface="Microsoft Himalaya"/>
-        <a:font script="Thaa" typeface="MV Boli"/>
-        <a:font script="Deva" typeface="Mangal"/>
-        <a:font script="Telu" typeface="Gautami"/>
-        <a:font script="Taml" typeface="Latha"/>
-        <a:font script="Syrc" typeface="Estrangelo Edessa"/>
-        <a:font script="Orya" typeface="Kalinga"/>
-        <a:font script="Mlym" typeface="Kartika"/>
-        <a:font script="Laoo" typeface="DokChampa"/>
-        <a:font script="Sinh" typeface="Iskoola Pota"/>
-        <a:font script="Mong" typeface="Mongolian Baiti"/>
-        <a:font script="Viet" typeface="Times New Roman"/>
-        <a:font script="Uigh" typeface="Microsoft Uighur"/>
-        <a:font script="Geor" typeface="Sylfaen"/>
-      </a:majorFont>
-      <a:minorFont>
-        <a:latin typeface="Arial"/>
-        <a:ea typeface=""/>
-        <a:cs typeface=""/>
-        <a:font script="Jpan" typeface="ＭＳ Ｐゴシック"/>
-        <a:font script="Hang" typeface="맑은 고딕"/>
-        <a:font script="Hans" typeface="宋体"/>
-        <a:font script="Hant" typeface="新細明體"/>
-        <a:font script="Arab" typeface="Arial"/>
-        <a:font script="Hebr" typeface="Arial"/>
-        <a:font script="Thai" typeface="Cordia New"/>
-        <a:font script="Ethi" typeface="Nyala"/>
-        <a:font script="Beng" typeface="Vrinda"/>
-        <a:font script="Gujr" typeface="Shruti"/>
-        <a:font script="Khmr" typeface="DaunPenh"/>
-        <a:font script="Knda" typeface="Tunga"/>
-        <a:font script="Guru" typeface="Raavi"/>
-        <a:font script="Cans" typeface="Euphemia"/>
-        <a:font script="Cher" typeface="Plantagenet Cherokee"/>
-        <a:font script="Yiii" typeface="Microsoft Yi Baiti"/>
-        <a:font script="Tibt" typeface="Microsoft Himalaya"/>
-        <a:font script="Thaa" typeface="MV Boli"/>
-        <a:font script="Deva" typeface="Mangal"/>
-        <a:font script="Telu" typeface="Gautami"/>
-        <a:font script="Taml" typeface="Latha"/>
-        <a:font script="Syrc" typeface="Estrangelo Edessa"/>
-        <a:font script="Orya" typeface="Kalinga"/>
-        <a:font script="Mlym" typeface="Kartika"/>
-        <a:font script="Laoo" typeface="DokChampa"/>
-        <a:font script="Sinh" typeface="Iskoola Pota"/>
-        <a:font script="Mong" typeface="Mongolian Baiti"/>
-        <a:font script="Viet" typeface="Arial"/>
-        <a:font script="Uigh" typeface="Microsoft Uighur"/>
-        <a:font script="Geor" typeface="Sylfaen"/>
-      </a:minorFont>
-    </a:fontScheme>
-    <a:fmtScheme name="Office">
-      <a:fillStyleLst>
-        <a:solidFill>
-          <a:schemeClr val="phClr"/>
-        </a:solidFill>
-        <a:gradFill rotWithShape="1">
-          <a:gsLst>
-            <a:gs pos="0">
-              <a:schemeClr val="phClr">
-                <a:tint val="50000"/>
-                <a:satMod val="300000"/>
-              </a:schemeClr>
-            </a:gs>
-            <a:gs pos="35000">
-              <a:schemeClr val="phClr">
-                <a:tint val="37000"/>
-                <a:satMod val="300000"/>
-              </a:schemeClr>
-            </a:gs>
-            <a:gs pos="100000">
-              <a:schemeClr val="phClr">
-                <a:tint val="15000"/>
-                <a:satMod val="350000"/>
-              </a:schemeClr>
-            </a:gs>
-          </a:gsLst>
-          <a:lin ang="16200000" scaled="1"/>
-        </a:gradFill>
-        <a:gradFill rotWithShape="1">
-          <a:gsLst>
-            <a:gs pos="0">
-              <a:schemeClr val="phClr">
-                <a:tint val="100000"/>
-                <a:shade val="100000"/>
-                <a:satMod val="130000"/>
-              </a:schemeClr>
-            </a:gs>
-            <a:gs pos="100000">
-              <a:schemeClr val="phClr">
-                <a:tint val="50000"/>
-                <a:shade val="100000"/>
-                <a:satMod val="350000"/>
-              </a:schemeClr>
-            </a:gs>
-          </a:gsLst>
-          <a:lin ang="16200000" scaled="0"/>
-        </a:gradFill>
-      </a:fillStyleLst>
-      <a:lnStyleLst>
-        <a:ln w="9525" cap="flat" cmpd="sng" algn="ctr">
-          <a:solidFill>
-            <a:schemeClr val="phClr">
-              <a:shade val="95000"/>
-              <a:satMod val="105000"/>
-            </a:schemeClr>
-          </a:solidFill>
-          <a:prstDash val="solid"/>
-        </a:ln>
-        <a:ln w="25400" cap="flat" cmpd="sng" algn="ctr">
-          <a:solidFill>
-            <a:schemeClr val="phClr"/>
-          </a:solidFill>
-          <a:prstDash val="solid"/>
-        </a:ln>
-        <a:ln w="38100" cap="flat" cmpd="sng" algn="ctr">
-          <a:solidFill>
-            <a:schemeClr val="phClr"/>
-          </a:solidFill>
-          <a:prstDash val="solid"/>
-        </a:ln>
-      </a:lnStyleLst>
-      <a:effectStyleLst>
-        <a:effectStyle>
-          <a:effectLst>
-            <a:outerShdw blurRad="40000" dist="20000" dir="5400000" rotWithShape="0">
-              <a:srgbClr val="000000">
-                <a:alpha val="38000"/>
-              </a:srgbClr>
-            </a:outerShdw>
-          </a:effectLst>
-        </a:effectStyle>
-        <a:effectStyle>
-          <a:effectLst>
-            <a:outerShdw blurRad="40000" dist="23000" dir="5400000" rotWithShape="0">
-              <a:srgbClr val="000000">
-                <a:alpha val="35000"/>
-              </a:srgbClr>
-            </a:outerShdw>
-          </a:effectLst>
-        </a:effectStyle>
-        <a:effectStyle>
-          <a:effectLst>
-            <a:outerShdw blurRad="40000" dist="23000" dir="5400000" rotWithShape="0">
-              <a:srgbClr val="000000">
-                <a:alpha val="35000"/>
-              </a:srgbClr>
-            </a:outerShdw>
-          </a:effectLst>
-          <a:scene3d>
-            <a:camera prst="orthographicFront">
-              <a:rot lat="0" lon="0" rev="0"/>
-            </a:camera>
-            <a:lightRig rig="threePt" dir="t">
-              <a:rot lat="0" lon="0" rev="1200000"/>
-            </a:lightRig>
-          </a:scene3d>
-          <a:sp3d>
-            <a:bevelT w="63500" h="25400"/>
-          </a:sp3d>
-        </a:effectStyle>
-      </a:effectStyleLst>
-      <a:bgFillStyleLst>
-        <a:solidFill>
-          <a:schemeClr val="phClr"/>
-        </a:solidFill>
-        <a:gradFill rotWithShape="1">
-          <a:gsLst>
-            <a:gs pos="0">
-              <a:schemeClr val="phClr">
-                <a:tint val="40000"/>
-                <a:satMod val="350000"/>
-              </a:schemeClr>
-            </a:gs>
-            <a:gs pos="40000">
-              <a:schemeClr val="phClr">
-                <a:tint val="45000"/>
-                <a:shade val="99000"/>
-                <a:satMod val="350000"/>
-              </a:schemeClr>
-            </a:gs>
-            <a:gs pos="100000">
-              <a:schemeClr val="phClr">
-                <a:shade val="20000"/>
-                <a:satMod val="255000"/>
-              </a:schemeClr>
-            </a:gs>
-          </a:gsLst>
-          <a:path path="circle">
-            <a:fillToRect l="50000" t="-80000" r="50000" b="180000"/>
-          </a:path>
-        </a:gradFill>
-        <a:gradFill rotWithShape="1">
-          <a:gsLst>
-            <a:gs pos="0">
-              <a:schemeClr val="phClr">
-                <a:tint val="80000"/>
-                <a:satMod val="300000"/>
-              </a:schemeClr>
-            </a:gs>
-            <a:gs pos="100000">
-              <a:schemeClr val="phClr">
-                <a:shade val="30000"/>
-                <a:satMod val="200000"/>
-              </a:schemeClr>
-            </a:gs>
-          </a:gsLst>
-          <a:path path="circle">
-            <a:fillToRect l="50000" t="50000" r="50000" b="50000"/>
-          </a:path>
-        </a:gradFill>
-      </a:bgFillStyleLst>
-    </a:fmtScheme>
-  </a:themeElements>
-</a:theme>
 </file>